--- a/supporting_docs/ppt.pptx
+++ b/supporting_docs/ppt.pptx
@@ -216,7 +216,7 @@
           <a:p>
             <a:fld id="{FE6FE288-384A-4216-96F8-D03E3ACDB7CB}" type="datetimeFigureOut">
               <a:rPr lang="en-IN" smtClean="0"/>
-              <a:t>11-03-2026</a:t>
+              <a:t>24-03-2026</a:t>
             </a:fld>
             <a:endParaRPr lang="en-IN"/>
           </a:p>
@@ -1641,7 +1641,7 @@
           <a:p>
             <a:fld id="{E81CCAC0-9D87-4460-89B0-6D59608D342A}" type="datetimeFigureOut">
               <a:rPr lang="en-IN" smtClean="0"/>
-              <a:t>11-03-2026</a:t>
+              <a:t>24-03-2026</a:t>
             </a:fld>
             <a:endParaRPr lang="en-IN"/>
           </a:p>
@@ -1841,7 +1841,7 @@
           <a:p>
             <a:fld id="{E81CCAC0-9D87-4460-89B0-6D59608D342A}" type="datetimeFigureOut">
               <a:rPr lang="en-IN" smtClean="0"/>
-              <a:t>11-03-2026</a:t>
+              <a:t>24-03-2026</a:t>
             </a:fld>
             <a:endParaRPr lang="en-IN"/>
           </a:p>
@@ -2051,7 +2051,7 @@
           <a:p>
             <a:fld id="{E81CCAC0-9D87-4460-89B0-6D59608D342A}" type="datetimeFigureOut">
               <a:rPr lang="en-IN" smtClean="0"/>
-              <a:t>11-03-2026</a:t>
+              <a:t>24-03-2026</a:t>
             </a:fld>
             <a:endParaRPr lang="en-IN"/>
           </a:p>
@@ -2251,7 +2251,7 @@
           <a:p>
             <a:fld id="{E81CCAC0-9D87-4460-89B0-6D59608D342A}" type="datetimeFigureOut">
               <a:rPr lang="en-IN" smtClean="0"/>
-              <a:t>11-03-2026</a:t>
+              <a:t>24-03-2026</a:t>
             </a:fld>
             <a:endParaRPr lang="en-IN"/>
           </a:p>
@@ -2527,7 +2527,7 @@
           <a:p>
             <a:fld id="{E81CCAC0-9D87-4460-89B0-6D59608D342A}" type="datetimeFigureOut">
               <a:rPr lang="en-IN" smtClean="0"/>
-              <a:t>11-03-2026</a:t>
+              <a:t>24-03-2026</a:t>
             </a:fld>
             <a:endParaRPr lang="en-IN"/>
           </a:p>
@@ -2795,7 +2795,7 @@
           <a:p>
             <a:fld id="{E81CCAC0-9D87-4460-89B0-6D59608D342A}" type="datetimeFigureOut">
               <a:rPr lang="en-IN" smtClean="0"/>
-              <a:t>11-03-2026</a:t>
+              <a:t>24-03-2026</a:t>
             </a:fld>
             <a:endParaRPr lang="en-IN"/>
           </a:p>
@@ -3210,7 +3210,7 @@
           <a:p>
             <a:fld id="{E81CCAC0-9D87-4460-89B0-6D59608D342A}" type="datetimeFigureOut">
               <a:rPr lang="en-IN" smtClean="0"/>
-              <a:t>11-03-2026</a:t>
+              <a:t>24-03-2026</a:t>
             </a:fld>
             <a:endParaRPr lang="en-IN"/>
           </a:p>
@@ -3352,7 +3352,7 @@
           <a:p>
             <a:fld id="{E81CCAC0-9D87-4460-89B0-6D59608D342A}" type="datetimeFigureOut">
               <a:rPr lang="en-IN" smtClean="0"/>
-              <a:t>11-03-2026</a:t>
+              <a:t>24-03-2026</a:t>
             </a:fld>
             <a:endParaRPr lang="en-IN"/>
           </a:p>
@@ -3465,7 +3465,7 @@
           <a:p>
             <a:fld id="{E81CCAC0-9D87-4460-89B0-6D59608D342A}" type="datetimeFigureOut">
               <a:rPr lang="en-IN" smtClean="0"/>
-              <a:t>11-03-2026</a:t>
+              <a:t>24-03-2026</a:t>
             </a:fld>
             <a:endParaRPr lang="en-IN"/>
           </a:p>
@@ -3778,7 +3778,7 @@
           <a:p>
             <a:fld id="{E81CCAC0-9D87-4460-89B0-6D59608D342A}" type="datetimeFigureOut">
               <a:rPr lang="en-IN" smtClean="0"/>
-              <a:t>11-03-2026</a:t>
+              <a:t>24-03-2026</a:t>
             </a:fld>
             <a:endParaRPr lang="en-IN"/>
           </a:p>
@@ -4067,7 +4067,7 @@
           <a:p>
             <a:fld id="{E81CCAC0-9D87-4460-89B0-6D59608D342A}" type="datetimeFigureOut">
               <a:rPr lang="en-IN" smtClean="0"/>
-              <a:t>11-03-2026</a:t>
+              <a:t>24-03-2026</a:t>
             </a:fld>
             <a:endParaRPr lang="en-IN"/>
           </a:p>
@@ -4310,7 +4310,7 @@
           <a:p>
             <a:fld id="{E81CCAC0-9D87-4460-89B0-6D59608D342A}" type="datetimeFigureOut">
               <a:rPr lang="en-IN" smtClean="0"/>
-              <a:t>11-03-2026</a:t>
+              <a:t>24-03-2026</a:t>
             </a:fld>
             <a:endParaRPr lang="en-IN"/>
           </a:p>
@@ -9110,36 +9110,8 @@
                 </a:solidFill>
                 <a:effectLst/>
               </a:rPr>
-              <a:t>Live App: </a:t>
-            </a:r>
-            <a:r>
-              <a:rPr lang="en-IN" sz="1800" i="0" u="none" strike="noStrike" dirty="0">
-                <a:solidFill>
-                  <a:schemeClr val="tx1">
-                    <a:lumMod val="75000"/>
-                    <a:lumOff val="25000"/>
-                  </a:schemeClr>
-                </a:solidFill>
-                <a:effectLst/>
-                <a:hlinkClick r:id="rId3">
-                  <a:extLst>
-                    <a:ext uri="{A12FA001-AC4F-418D-AE19-62706E023703}">
-                      <ahyp:hlinkClr xmlns:ahyp="http://schemas.microsoft.com/office/drawing/2018/hyperlinkcolor" val="tx"/>
-                    </a:ext>
-                  </a:extLst>
-                </a:hlinkClick>
-              </a:rPr>
-              <a:t>https://web-production-4bd43.up.railway.app</a:t>
-            </a:r>
-            <a:endParaRPr lang="en-IN" sz="1800" i="0" dirty="0">
-              <a:solidFill>
-                <a:schemeClr val="tx1">
-                  <a:lumMod val="75000"/>
-                  <a:lumOff val="25000"/>
-                </a:schemeClr>
-              </a:solidFill>
-              <a:effectLst/>
-            </a:endParaRPr>
+              <a:t>Live App: https://demand-forecasting-for-spare-parts.vercel.app/</a:t>
+            </a:r>
           </a:p>
           <a:p>
             <a:r>
@@ -9176,7 +9148,7 @@
                 </a:solidFill>
                 <a:effectLst/>
               </a:rPr>
-              <a:t>/Demand-Forecasting-for-KPCL-spare-parts</a:t>
+              <a:t>/Demand-Forecasting-for-spare-parts</a:t>
             </a:r>
           </a:p>
         </p:txBody>
